--- a/03. Documents/02. Data Platform Architecture/HDB_Proposed_Data_Platform_Architecture_AWS_vs_Azure.pptx
+++ b/03. Documents/02. Data Platform Architecture/HDB_Proposed_Data_Platform_Architecture_AWS_vs_Azure.pptx
@@ -5937,7 +5937,7 @@
         <p:spPr>
           <a:xfrm>
             <a:off x="1852621" y="779672"/>
-            <a:ext cx="8683117" cy="323165"/>
+            <a:ext cx="8659541" cy="323165"/>
           </a:xfrm>
           <a:prstGeom prst="rect">
             <a:avLst/>
@@ -6151,8 +6151,8 @@
         </p:nvSpPr>
         <p:spPr>
           <a:xfrm>
-            <a:off x="1994199" y="2011929"/>
-            <a:ext cx="1452099" cy="4285452"/>
+            <a:off x="1994200" y="2011928"/>
+            <a:ext cx="1417890" cy="4469835"/>
           </a:xfrm>
           <a:prstGeom prst="rect">
             <a:avLst/>
@@ -9565,7 +9565,7 @@
         <p:grpSpPr>
           <a:xfrm>
             <a:off x="1859496" y="1212333"/>
-            <a:ext cx="8914200" cy="5471706"/>
+            <a:ext cx="8666417" cy="5471706"/>
             <a:chOff x="355600" y="1512745"/>
             <a:chExt cx="1765300" cy="890588"/>
           </a:xfrm>
@@ -10527,8 +10527,8 @@
         </p:blipFill>
         <p:spPr bwMode="auto">
           <a:xfrm>
-            <a:off x="6048124" y="5149234"/>
-            <a:ext cx="307288" cy="307288"/>
+            <a:off x="6048123" y="5149233"/>
+            <a:ext cx="332673" cy="332673"/>
           </a:xfrm>
           <a:prstGeom prst="rect">
             <a:avLst/>
@@ -10585,7 +10585,7 @@
         </p:blipFill>
         <p:spPr bwMode="auto">
           <a:xfrm>
-            <a:off x="6086076" y="5801017"/>
+            <a:off x="6086076" y="5862892"/>
             <a:ext cx="353710" cy="353710"/>
           </a:xfrm>
           <a:prstGeom prst="rect">
@@ -10748,7 +10748,7 @@
         </p:nvSpPr>
         <p:spPr bwMode="auto">
           <a:xfrm>
-            <a:off x="7766516" y="6256851"/>
+            <a:off x="7766516" y="6270601"/>
             <a:ext cx="1170308" cy="215444"/>
           </a:xfrm>
           <a:prstGeom prst="rect">
@@ -10922,7 +10922,7 @@
         </p:blipFill>
         <p:spPr bwMode="auto">
           <a:xfrm>
-            <a:off x="7018403" y="5105132"/>
+            <a:off x="7018403" y="5139507"/>
             <a:ext cx="340488" cy="340488"/>
           </a:xfrm>
           <a:prstGeom prst="rect">
@@ -10980,7 +10980,7 @@
         </p:blipFill>
         <p:spPr bwMode="auto">
           <a:xfrm>
-            <a:off x="8055750" y="5123735"/>
+            <a:off x="8083250" y="5151235"/>
             <a:ext cx="348066" cy="348066"/>
           </a:xfrm>
           <a:prstGeom prst="rect">
@@ -11130,8 +11130,8 @@
         </p:nvSpPr>
         <p:spPr bwMode="auto">
           <a:xfrm>
-            <a:off x="9706551" y="3583068"/>
-            <a:ext cx="1116052" cy="246221"/>
+            <a:off x="9763347" y="3559664"/>
+            <a:ext cx="810164" cy="400110"/>
           </a:xfrm>
           <a:prstGeom prst="rect">
             <a:avLst/>
@@ -11277,52 +11277,6 @@
           </a:p>
         </p:txBody>
       </p:sp>
-      <p:cxnSp>
-        <p:nvCxnSpPr>
-          <p:cNvPr id="67" name="Straight Arrow Connector 66">
-            <a:extLst>
-              <a:ext uri="{FF2B5EF4-FFF2-40B4-BE49-F238E27FC236}">
-                <a16:creationId xmlns:a16="http://schemas.microsoft.com/office/drawing/2014/main" id="{DC719FFD-21CA-21A5-463D-4C9E3098878D}"/>
-              </a:ext>
-            </a:extLst>
-          </p:cNvPr>
-          <p:cNvCxnSpPr>
-            <a:cxnSpLocks/>
-          </p:cNvCxnSpPr>
-          <p:nvPr/>
-        </p:nvCxnSpPr>
-        <p:spPr>
-          <a:xfrm flipH="1">
-            <a:off x="10404731" y="3378709"/>
-            <a:ext cx="404613" cy="2344"/>
-          </a:xfrm>
-          <a:prstGeom prst="straightConnector1">
-            <a:avLst/>
-          </a:prstGeom>
-          <a:ln w="12700">
-            <a:solidFill>
-              <a:srgbClr val="002060"/>
-            </a:solidFill>
-            <a:prstDash val="sysDot"/>
-            <a:headEnd type="triangle"/>
-            <a:tailEnd type="triangle"/>
-          </a:ln>
-        </p:spPr>
-        <p:style>
-          <a:lnRef idx="1">
-            <a:schemeClr val="accent1"/>
-          </a:lnRef>
-          <a:fillRef idx="0">
-            <a:schemeClr val="accent1"/>
-          </a:fillRef>
-          <a:effectRef idx="0">
-            <a:schemeClr val="accent1"/>
-          </a:effectRef>
-          <a:fontRef idx="minor">
-            <a:schemeClr val="tx1"/>
-          </a:fontRef>
-        </p:style>
-      </p:cxnSp>
       <p:cxnSp>
         <p:nvCxnSpPr>
           <p:cNvPr id="68" name="Connector: Elbow 67">
@@ -12797,6 +12751,51 @@
           </a:prstGeom>
         </p:spPr>
       </p:pic>
+      <p:cxnSp>
+        <p:nvCxnSpPr>
+          <p:cNvPr id="3" name="Straight Arrow Connector 2">
+            <a:extLst>
+              <a:ext uri="{FF2B5EF4-FFF2-40B4-BE49-F238E27FC236}">
+                <a16:creationId xmlns:a16="http://schemas.microsoft.com/office/drawing/2014/main" id="{3147E78D-BBB7-0886-285C-7A67A822C187}"/>
+              </a:ext>
+            </a:extLst>
+          </p:cNvPr>
+          <p:cNvCxnSpPr>
+            <a:cxnSpLocks/>
+          </p:cNvCxnSpPr>
+          <p:nvPr/>
+        </p:nvCxnSpPr>
+        <p:spPr>
+          <a:xfrm>
+            <a:off x="10418600" y="3387470"/>
+            <a:ext cx="509901" cy="0"/>
+          </a:xfrm>
+          <a:prstGeom prst="straightConnector1">
+            <a:avLst/>
+          </a:prstGeom>
+          <a:ln w="12700">
+            <a:solidFill>
+              <a:srgbClr val="002060"/>
+            </a:solidFill>
+            <a:prstDash val="sysDot"/>
+            <a:tailEnd type="triangle"/>
+          </a:ln>
+        </p:spPr>
+        <p:style>
+          <a:lnRef idx="1">
+            <a:schemeClr val="accent1"/>
+          </a:lnRef>
+          <a:fillRef idx="0">
+            <a:schemeClr val="accent1"/>
+          </a:fillRef>
+          <a:effectRef idx="0">
+            <a:schemeClr val="accent1"/>
+          </a:effectRef>
+          <a:fontRef idx="minor">
+            <a:schemeClr val="tx1"/>
+          </a:fontRef>
+        </p:style>
+      </p:cxnSp>
     </p:spTree>
     <p:extLst>
       <p:ext uri="{BB962C8B-B14F-4D97-AF65-F5344CB8AC3E}">
